--- a/promo/포스터_편집원본.pptx
+++ b/promo/포스터_편집원본.pptx
@@ -2679,6 +2679,42 @@
                 <a:cs typeface="Pretendard ExtraBold" pitchFamily="34" charset="-120"/>
               </a:rPr>
               <a:t>.</a:t>
+            </a:r>
+          </a:p>
+        </p:txBody>
+      </p:sp>
+      <p:sp>
+        <p:nvSpPr>
+          <p:cNvPr id="67" name="국립대학육성사업 지원 문구"/>
+          <p:cNvSpPr txBox="1"/>
+          <p:nvPr/>
+        </p:nvSpPr>
+        <p:spPr>
+          <a:xfrm>
+            <a:off x="0" y="10220325"/>
+            <a:ext cx="7559675" cy="133350"/>
+          </a:xfrm>
+          <a:prstGeom prst="rect">
+            <a:avLst/>
+          </a:prstGeom>
+          <a:noFill/>
+        </p:spPr>
+        <p:txBody>
+          <a:bodyPr wrap="none" lIns="0" rIns="0" tIns="0" bIns="0" anchor="ctr">
+            <a:spAutoFit/>
+          </a:bodyPr>
+          <a:lstStyle/>
+          <a:p>
+            <a:pPr algn="ctr"/>
+            <a:r>
+              <a:rPr sz="750" lang="ko-KR">
+                <a:solidFill>
+                  <a:srgbClr val="80796A"/>
+                </a:solidFill>
+                <a:latin typeface="Pretendard Medium"/>
+                <a:ea typeface="Pretendard Medium"/>
+              </a:rPr>
+              <a:t>본 행사는 2026년 국립대학육성사업의 지원을 받아 운영됩니다.</a:t>
             </a:r>
           </a:p>
         </p:txBody>
